--- a/Schools_ML_Track/camp_2026/slides/ML/ML11.pptx
+++ b/Schools_ML_Track/camp_2026/slides/ML/ML11.pptx
@@ -128,7 +128,7 @@
   <p:extLst>
     <p:ext uri="{521415D9-36F7-43E2-AB2F-B90AF26B5E84}">
       <p14:sectionLst xmlns:p14="http://schemas.microsoft.com/office/powerpoint/2010/main">
-        <p14:section name="Opening" id="{ca11ce5b-6f03-5053-0401-98d165e736cb}">
+        <p14:section name="Opening" id="{e6677c03-8744-825d-1385-23e51cc50daa}">
           <p14:sldIdLst>
             <p14:sldId id="256"/>
             <p14:sldId id="257"/>
@@ -139,7 +139,7 @@
             <p14:sldId id="262"/>
           </p14:sldIdLst>
         </p14:section>
-        <p14:section name="Block A" id="{1f5253d3-ec47-524e-2c7a-098f6f5a82f5}">
+        <p14:section name="Block A" id="{708a25a7-5402-e330-c5e7-e11e9bd7928a}">
           <p14:sldIdLst>
             <p14:sldId id="263"/>
             <p14:sldId id="264"/>
@@ -149,15 +149,15 @@
             <p14:sldId id="269"/>
           </p14:sldIdLst>
         </p14:section>
-        <p14:section name="Break" id="{59a91af2-514e-7ff6-c034-138042b7cda3}">
+        <p14:section name="Break" id="{bf9fa179-f148-0b12-1100-c6f215f3dd71}">
           <p14:sldIdLst>
             <p14:sldId id="267"/>
           </p14:sldIdLst>
         </p14:section>
-        <p14:section name="Block A" id="{fc289e08-c145-4c83-df0b-486a386880b2}">
+        <p14:section name="Block A" id="{52c11592-1699-ca6d-139f-5e0b16b45c9f}">
           <p14:sldIdLst/>
         </p14:section>
-        <p14:section name="Block B" id="{fbc4f5b1-cfb2-051a-87df-fdcf0bb4aa94}">
+        <p14:section name="Block B" id="{c1ce6213-5848-2d77-bb83-f6a413adbae0}">
           <p14:sldIdLst>
             <p14:sldId id="270"/>
             <p14:sldId id="271"/>
@@ -166,7 +166,7 @@
             <p14:sldId id="274"/>
           </p14:sldIdLst>
         </p14:section>
-        <p14:section name="Make and close" id="{04dd3752-95d2-602f-ad24-3804487b2c33}">
+        <p14:section name="Make and close" id="{53f59992-ea0a-b7e7-7f45-d8349fb3b8ac}">
           <p14:sldIdLst>
             <p14:sldId id="275"/>
             <p14:sldId id="276"/>

--- a/Schools_ML_Track/camp_2026/slides/ML/ML11.pptx
+++ b/Schools_ML_Track/camp_2026/slides/ML/ML11.pptx
@@ -128,7 +128,7 @@
   <p:extLst>
     <p:ext uri="{521415D9-36F7-43E2-AB2F-B90AF26B5E84}">
       <p14:sectionLst xmlns:p14="http://schemas.microsoft.com/office/powerpoint/2010/main">
-        <p14:section name="Opening" id="{e6677c03-8744-825d-1385-23e51cc50daa}">
+        <p14:section name="Opening" id="{d21d7723-c6f8-108c-b4d6-7906d0903232}">
           <p14:sldIdLst>
             <p14:sldId id="256"/>
             <p14:sldId id="257"/>
@@ -139,7 +139,7 @@
             <p14:sldId id="262"/>
           </p14:sldIdLst>
         </p14:section>
-        <p14:section name="Block A" id="{708a25a7-5402-e330-c5e7-e11e9bd7928a}">
+        <p14:section name="Block A" id="{21227b78-3046-4533-a425-3c91eccd14ad}">
           <p14:sldIdLst>
             <p14:sldId id="263"/>
             <p14:sldId id="264"/>
@@ -149,15 +149,15 @@
             <p14:sldId id="269"/>
           </p14:sldIdLst>
         </p14:section>
-        <p14:section name="Break" id="{bf9fa179-f148-0b12-1100-c6f215f3dd71}">
+        <p14:section name="Break" id="{e464d010-d789-04d1-ea5e-2e4b0b0b7983}">
           <p14:sldIdLst>
             <p14:sldId id="267"/>
           </p14:sldIdLst>
         </p14:section>
-        <p14:section name="Block A" id="{52c11592-1699-ca6d-139f-5e0b16b45c9f}">
+        <p14:section name="Block A" id="{1b938542-3c24-673f-4867-89b0a587bdf6}">
           <p14:sldIdLst/>
         </p14:section>
-        <p14:section name="Block B" id="{c1ce6213-5848-2d77-bb83-f6a413adbae0}">
+        <p14:section name="Block B" id="{5c45b337-2bbb-359f-ff25-10b36caaebb5}">
           <p14:sldIdLst>
             <p14:sldId id="270"/>
             <p14:sldId id="271"/>
@@ -166,7 +166,7 @@
             <p14:sldId id="274"/>
           </p14:sldIdLst>
         </p14:section>
-        <p14:section name="Make and close" id="{53f59992-ea0a-b7e7-7f45-d8349fb3b8ac}">
+        <p14:section name="Make and close" id="{c25fdbb0-6442-fd26-b6cd-a731fe45e884}">
           <p14:sldIdLst>
             <p14:sldId id="275"/>
             <p14:sldId id="276"/>
@@ -3197,7 +3197,24 @@
                 <a:ea typeface="Lato" pitchFamily="34" charset="-122"/>
                 <a:cs typeface="Lato" pitchFamily="34" charset="-120"/>
               </a:rPr>
-              <a:t>Charts that show what the numbers say</a:t>
+              <a:t>Charts that show</a:t>
+            </a:r>
+            <a:endParaRPr lang="en-US" sz="5600" dirty="0"/>
+          </a:p>
+          <a:p>
+            <a:pPr algn="l" indent="0" marL="0">
+              <a:buNone/>
+            </a:pPr>
+            <a:r>
+              <a:rPr lang="en-US" sz="5600" b="1" dirty="0">
+                <a:solidFill>
+                  <a:srgbClr val="FFFFFF"/>
+                </a:solidFill>
+                <a:latin typeface="Lato" pitchFamily="34" charset="0"/>
+                <a:ea typeface="Lato" pitchFamily="34" charset="-122"/>
+                <a:cs typeface="Lato" pitchFamily="34" charset="-120"/>
+              </a:rPr>
+              <a:t>what the numbers say</a:t>
             </a:r>
             <a:endParaRPr lang="en-US" sz="5600" dirty="0"/>
           </a:p>
@@ -5167,9 +5184,100 @@
           </a:p>
         </p:txBody>
       </p:sp>
+      <p:sp>
+        <p:nvSpPr>
+          <p:cNvPr id="3" name="Text 1"/>
+          <p:cNvSpPr txBox="1"/>
+          <p:nvPr/>
+        </p:nvSpPr>
+        <p:spPr>
+          <a:xfrm>
+            <a:off x="640080" y="1737360"/>
+            <a:ext cx="7498080" cy="4389120"/>
+          </a:xfrm>
+          <a:prstGeom prst="rect">
+            <a:avLst/>
+          </a:prstGeom>
+          <a:noFill/>
+          <a:ln/>
+        </p:spPr>
+        <p:txBody>
+          <a:bodyPr wrap="square" lIns="0" tIns="0" rIns="0" bIns="0" rtlCol="0" anchor="t"/>
+          <a:lstStyle/>
+          <a:p>
+            <a:pPr algn="l" indent="0" marL="0">
+              <a:lnSpc>
+                <a:spcPts val="3600"/>
+              </a:lnSpc>
+              <a:spcAft>
+                <a:spcPts val="1800"/>
+              </a:spcAft>
+              <a:buNone/>
+            </a:pPr>
+            <a:r>
+              <a:rPr lang="en-US" sz="3000" dirty="0">
+                <a:solidFill>
+                  <a:srgbClr val="111111"/>
+                </a:solidFill>
+                <a:latin typeface="Lato" pitchFamily="34" charset="0"/>
+                <a:ea typeface="Lato" pitchFamily="34" charset="-122"/>
+                <a:cs typeface="Lato" pitchFamily="34" charset="-120"/>
+              </a:rPr>
+              <a:t>The histogram counts sales for each number of units and shows how they spread from 1 to 8.</a:t>
+            </a:r>
+            <a:endParaRPr lang="en-US" sz="3000" dirty="0"/>
+          </a:p>
+          <a:p>
+            <a:pPr algn="l" indent="0" marL="0">
+              <a:lnSpc>
+                <a:spcPts val="3600"/>
+              </a:lnSpc>
+              <a:spcAft>
+                <a:spcPts val="1800"/>
+              </a:spcAft>
+              <a:buNone/>
+            </a:pPr>
+            <a:r>
+              <a:rPr lang="en-US" sz="3000" dirty="0">
+                <a:solidFill>
+                  <a:srgbClr val="111111"/>
+                </a:solidFill>
+                <a:latin typeface="Lato" pitchFamily="34" charset="0"/>
+                <a:ea typeface="Lato" pitchFamily="34" charset="-122"/>
+                <a:cs typeface="Lato" pitchFamily="34" charset="-120"/>
+              </a:rPr>
+              <a:t>The box plot shows one box per item with a line at its median.</a:t>
+            </a:r>
+            <a:endParaRPr lang="en-US" sz="3000" dirty="0"/>
+          </a:p>
+          <a:p>
+            <a:pPr algn="l" indent="0" marL="0">
+              <a:lnSpc>
+                <a:spcPts val="3600"/>
+              </a:lnSpc>
+              <a:spcAft>
+                <a:spcPts val="1800"/>
+              </a:spcAft>
+              <a:buNone/>
+            </a:pPr>
+            <a:r>
+              <a:rPr lang="en-US" sz="3000" dirty="0">
+                <a:solidFill>
+                  <a:srgbClr val="111111"/>
+                </a:solidFill>
+                <a:latin typeface="Lato" pitchFamily="34" charset="0"/>
+                <a:ea typeface="Lato" pitchFamily="34" charset="-122"/>
+                <a:cs typeface="Lato" pitchFamily="34" charset="-120"/>
+              </a:rPr>
+              <a:t>Juice has the lowest median, 3.5 units, while Book has 5.0 and Pen 5.5.</a:t>
+            </a:r>
+            <a:endParaRPr lang="en-US" sz="3000" dirty="0"/>
+          </a:p>
+        </p:txBody>
+      </p:sp>
       <p:pic>
         <p:nvPicPr>
-          <p:cNvPr id="3" name="Image 0" descr="A chart the code draws">    </p:cNvPr>
+          <p:cNvPr id="4" name="Image 0" descr="Compare with your guess">    </p:cNvPr>
           <p:cNvPicPr>
             <a:picLocks noChangeAspect="1"/>
           </p:cNvPicPr>
@@ -5183,83 +5291,14 @@
         </p:blipFill>
         <p:spPr>
           <a:xfrm>
-            <a:off x="1034544" y="1600200"/>
-            <a:ext cx="4560312" cy="3017520"/>
+            <a:off x="8778240" y="2194560"/>
+            <a:ext cx="2377440" cy="2377440"/>
           </a:xfrm>
           <a:prstGeom prst="rect">
             <a:avLst/>
           </a:prstGeom>
         </p:spPr>
       </p:pic>
-      <p:pic>
-        <p:nvPicPr>
-          <p:cNvPr id="4" name="Image 1" descr="A chart the code draws">    </p:cNvPr>
-          <p:cNvPicPr>
-            <a:picLocks noChangeAspect="1"/>
-          </p:cNvPicPr>
-          <p:nvPr/>
-        </p:nvPicPr>
-        <p:blipFill>
-          <a:blip r:embed="rId2"/>
-          <a:stretch>
-            <a:fillRect/>
-          </a:stretch>
-        </p:blipFill>
-        <p:spPr>
-          <a:xfrm>
-            <a:off x="6676323" y="1600200"/>
-            <a:ext cx="4340994" cy="3017520"/>
-          </a:xfrm>
-          <a:prstGeom prst="rect">
-            <a:avLst/>
-          </a:prstGeom>
-        </p:spPr>
-      </p:pic>
-      <p:sp>
-        <p:nvSpPr>
-          <p:cNvPr id="5" name="Text 1"/>
-          <p:cNvSpPr txBox="1"/>
-          <p:nvPr/>
-        </p:nvSpPr>
-        <p:spPr>
-          <a:xfrm>
-            <a:off x="640080" y="4800600"/>
-            <a:ext cx="10881360" cy="1463040"/>
-          </a:xfrm>
-          <a:prstGeom prst="rect">
-            <a:avLst/>
-          </a:prstGeom>
-          <a:noFill/>
-          <a:ln/>
-        </p:spPr>
-        <p:txBody>
-          <a:bodyPr wrap="square" lIns="0" tIns="0" rIns="0" bIns="0" rtlCol="0" anchor="t"/>
-          <a:lstStyle/>
-          <a:p>
-            <a:pPr algn="l" indent="0" marL="0">
-              <a:lnSpc>
-                <a:spcPts val="2760"/>
-              </a:lnSpc>
-              <a:spcAft>
-                <a:spcPts val="1010"/>
-              </a:spcAft>
-              <a:buNone/>
-            </a:pPr>
-            <a:r>
-              <a:rPr lang="en-US" sz="2300" dirty="0">
-                <a:solidFill>
-                  <a:srgbClr val="111111"/>
-                </a:solidFill>
-                <a:latin typeface="Lato" pitchFamily="34" charset="0"/>
-                <a:ea typeface="Lato" pitchFamily="34" charset="-122"/>
-                <a:cs typeface="Lato" pitchFamily="34" charset="-120"/>
-              </a:rPr>
-              <a:t>The histogram counts sales for each number of units and shows how they spread from 1 to 8. The box plot shows one box per item with a line at its median. Juice has the lowest median, 3.5 units, while Book has 5.0 and Pen 5.5.</a:t>
-            </a:r>
-            <a:endParaRPr lang="en-US" sz="2300" dirty="0"/>
-          </a:p>
-        </p:txBody>
-      </p:sp>
       <p:sp>
         <p:nvSpPr>
           <p:cNvPr id="25" name="Slide Number Placeholder 0"/>
@@ -6144,15 +6183,15 @@
           <a:p>
             <a:pPr algn="l" indent="0" marL="0">
               <a:lnSpc>
-                <a:spcPts val="3480"/>
+                <a:spcPts val="3240"/>
               </a:lnSpc>
               <a:spcAft>
-                <a:spcPts val="2520"/>
+                <a:spcPts val="2020"/>
               </a:spcAft>
               <a:buNone/>
             </a:pPr>
             <a:r>
-              <a:rPr lang="en-US" sz="2900" dirty="0">
+              <a:rPr lang="en-US" sz="2700" dirty="0">
                 <a:solidFill>
                   <a:srgbClr val="111111"/>
                 </a:solidFill>
@@ -6160,22 +6199,22 @@
                 <a:ea typeface="Lato" pitchFamily="34" charset="-122"/>
                 <a:cs typeface="Lato" pitchFamily="34" charset="-120"/>
               </a:rPr>
-              <a:t>Make the same bar chart for the values 6, 9 and 4 for Book, Pen and Juice. Write one finding with a number and one limitation. Say which chart type you would use for daily rainfall, and why.</a:t>
-            </a:r>
-            <a:endParaRPr lang="en-US" sz="2900" dirty="0"/>
-          </a:p>
-          <a:p>
-            <a:pPr algn="l" indent="0" marL="0">
-              <a:lnSpc>
-                <a:spcPts val="3480"/>
+              <a:t>Make the same bar chart for the values 6, 9 and 4 for Book, Pen and Juice.</a:t>
+            </a:r>
+            <a:endParaRPr lang="en-US" sz="2700" dirty="0"/>
+          </a:p>
+          <a:p>
+            <a:pPr algn="l" indent="0" marL="0">
+              <a:lnSpc>
+                <a:spcPts val="3240"/>
               </a:lnSpc>
               <a:spcAft>
-                <a:spcPts val="2520"/>
+                <a:spcPts val="2020"/>
               </a:spcAft>
               <a:buNone/>
             </a:pPr>
             <a:r>
-              <a:rPr lang="en-US" sz="2900" dirty="0">
+              <a:rPr lang="en-US" sz="2700" dirty="0">
                 <a:solidFill>
                   <a:srgbClr val="111111"/>
                 </a:solidFill>
@@ -6183,9 +6222,55 @@
                 <a:ea typeface="Lato" pitchFamily="34" charset="-122"/>
                 <a:cs typeface="Lato" pitchFamily="34" charset="-120"/>
               </a:rPr>
+              <a:t>Write one finding with a number and one limitation.</a:t>
+            </a:r>
+            <a:endParaRPr lang="en-US" sz="2700" dirty="0"/>
+          </a:p>
+          <a:p>
+            <a:pPr algn="l" indent="0" marL="0">
+              <a:lnSpc>
+                <a:spcPts val="3240"/>
+              </a:lnSpc>
+              <a:spcAft>
+                <a:spcPts val="2020"/>
+              </a:spcAft>
+              <a:buNone/>
+            </a:pPr>
+            <a:r>
+              <a:rPr lang="en-US" sz="2700" dirty="0">
+                <a:solidFill>
+                  <a:srgbClr val="111111"/>
+                </a:solidFill>
+                <a:latin typeface="Lato" pitchFamily="34" charset="0"/>
+                <a:ea typeface="Lato" pitchFamily="34" charset="-122"/>
+                <a:cs typeface="Lato" pitchFamily="34" charset="-120"/>
+              </a:rPr>
+              <a:t>Say which chart type you would use for daily rainfall, and why.</a:t>
+            </a:r>
+            <a:endParaRPr lang="en-US" sz="2700" dirty="0"/>
+          </a:p>
+          <a:p>
+            <a:pPr algn="l" indent="0" marL="0">
+              <a:lnSpc>
+                <a:spcPts val="3240"/>
+              </a:lnSpc>
+              <a:spcAft>
+                <a:spcPts val="2020"/>
+              </a:spcAft>
+              <a:buNone/>
+            </a:pPr>
+            <a:r>
+              <a:rPr lang="en-US" sz="2700" dirty="0">
+                <a:solidFill>
+                  <a:srgbClr val="111111"/>
+                </a:solidFill>
+                <a:latin typeface="Lato" pitchFamily="34" charset="0"/>
+                <a:ea typeface="Lato" pitchFamily="34" charset="-122"/>
+                <a:cs typeface="Lato" pitchFamily="34" charset="-120"/>
+              </a:rPr>
               <a:t>Save it as ML11. Write two sentences: what you changed and how you checked it.</a:t>
             </a:r>
-            <a:endParaRPr lang="en-US" sz="2900" dirty="0"/>
+            <a:endParaRPr lang="en-US" sz="2700" dirty="0"/>
           </a:p>
         </p:txBody>
       </p:sp>
